--- a/design/pptx-slides/output/YtAiDesignSystemSlides.pptx
+++ b/design/pptx-slides/output/YtAiDesignSystemSlides.pptx
@@ -1231,25 +1231,47 @@
           <a:chExt cx="0" cy="0"/>
         </a:xfrm>
       </p:grpSpPr>
-      <p:sp>
-        <p:nvSpPr>
-          <p:cNvPr id="2" name="Shape 0"/>
-          <p:cNvSpPr/>
-          <p:nvPr/>
-        </p:nvSpPr>
-        <p:spPr>
-          <a:xfrm>
-            <a:off x="274320" y="457200"/>
-            <a:ext cx="3840480" cy="3931920"/>
-          </a:xfrm>
-          <a:prstGeom prst="roundRect">
-            <a:avLst>
-              <a:gd name="adj" fmla="val 5952"/>
-            </a:avLst>
+      <p:pic>
+        <p:nvPicPr>
+          <p:cNvPr id="2" name="Image 0" descr="C:\Users\Samy Chouaf\Desktop\smart-creator-design-system\assets\textures\light-squares.png">    </p:cNvPr>
+          <p:cNvPicPr>
+            <a:picLocks noChangeAspect="1"/>
+          </p:cNvPicPr>
+          <p:nvPr/>
+        </p:nvPicPr>
+        <p:blipFill>
+          <a:blip r:embed="rId1"/>
+          <a:stretch>
+            <a:fillRect/>
+          </a:stretch>
+        </p:blipFill>
+        <p:spPr>
+          <a:xfrm>
+            <a:off x="0" y="0"/>
+            <a:ext cx="9144000" cy="5143500"/>
+          </a:xfrm>
+          <a:prstGeom prst="rect">
+            <a:avLst/>
+          </a:prstGeom>
+        </p:spPr>
+      </p:pic>
+      <p:sp>
+        <p:nvSpPr>
+          <p:cNvPr id="3" name="Shape 0"/>
+          <p:cNvSpPr/>
+          <p:nvPr/>
+        </p:nvSpPr>
+        <p:spPr>
+          <a:xfrm>
+            <a:off x="-411480" y="320040"/>
+            <a:ext cx="3108960" cy="3108960"/>
+          </a:xfrm>
+          <a:prstGeom prst="ellipse">
+            <a:avLst/>
           </a:prstGeom>
           <a:solidFill>
             <a:srgbClr val="B4EAFF">
-              <a:alpha val="12000"/>
+              <a:alpha val="22000"/>
             </a:srgbClr>
           </a:solidFill>
           <a:ln w="12700">
@@ -1264,23 +1286,21 @@
       </p:sp>
       <p:sp>
         <p:nvSpPr>
-          <p:cNvPr id="3" name="Shape 1"/>
-          <p:cNvSpPr/>
-          <p:nvPr/>
-        </p:nvSpPr>
-        <p:spPr>
-          <a:xfrm>
-            <a:off x="5029200" y="457200"/>
-            <a:ext cx="3840480" cy="3931920"/>
-          </a:xfrm>
-          <a:prstGeom prst="roundRect">
-            <a:avLst>
-              <a:gd name="adj" fmla="val 5952"/>
-            </a:avLst>
+          <p:cNvPr id="4" name="Shape 1"/>
+          <p:cNvSpPr/>
+          <p:nvPr/>
+        </p:nvSpPr>
+        <p:spPr>
+          <a:xfrm>
+            <a:off x="6492240" y="1234440"/>
+            <a:ext cx="3200400" cy="3200400"/>
+          </a:xfrm>
+          <a:prstGeom prst="ellipse">
+            <a:avLst/>
           </a:prstGeom>
           <a:solidFill>
             <a:srgbClr val="D2FF9A">
-              <a:alpha val="12000"/>
+              <a:alpha val="20000"/>
             </a:srgbClr>
           </a:solidFill>
           <a:ln w="12700">
@@ -1293,19 +1313,91 @@
           </a:ln>
         </p:spPr>
       </p:sp>
+      <p:sp>
+        <p:nvSpPr>
+          <p:cNvPr id="5" name="Shape 2"/>
+          <p:cNvSpPr/>
+          <p:nvPr/>
+        </p:nvSpPr>
+        <p:spPr>
+          <a:xfrm>
+            <a:off x="411480" y="713232"/>
+            <a:ext cx="2743200" cy="3246120"/>
+          </a:xfrm>
+          <a:prstGeom prst="roundRect">
+            <a:avLst>
+              <a:gd name="adj" fmla="val 8000"/>
+            </a:avLst>
+          </a:prstGeom>
+          <a:solidFill>
+            <a:srgbClr val="FFFFFF"/>
+          </a:solidFill>
+          <a:ln w="12700">
+            <a:solidFill>
+              <a:srgbClr val="FFFFFF">
+                <a:alpha val="0"/>
+              </a:srgbClr>
+            </a:solidFill>
+            <a:prstDash val="solid"/>
+          </a:ln>
+          <a:effectLst>
+            <a:outerShdw sx="100000" sy="100000" kx="0" ky="0" algn="bl" rotWithShape="0" blurRad="152400" dist="38100" dir="8100000">
+              <a:srgbClr val="000000">
+                <a:alpha val="22000"/>
+              </a:srgbClr>
+            </a:outerShdw>
+          </a:effectLst>
+        </p:spPr>
+      </p:sp>
+      <p:sp>
+        <p:nvSpPr>
+          <p:cNvPr id="6" name="Shape 3"/>
+          <p:cNvSpPr/>
+          <p:nvPr/>
+        </p:nvSpPr>
+        <p:spPr>
+          <a:xfrm>
+            <a:off x="5989320" y="713232"/>
+            <a:ext cx="2743200" cy="3246120"/>
+          </a:xfrm>
+          <a:prstGeom prst="roundRect">
+            <a:avLst>
+              <a:gd name="adj" fmla="val 8000"/>
+            </a:avLst>
+          </a:prstGeom>
+          <a:solidFill>
+            <a:srgbClr val="FFFFFF"/>
+          </a:solidFill>
+          <a:ln w="12700">
+            <a:solidFill>
+              <a:srgbClr val="FFFFFF">
+                <a:alpha val="0"/>
+              </a:srgbClr>
+            </a:solidFill>
+            <a:prstDash val="solid"/>
+          </a:ln>
+          <a:effectLst>
+            <a:outerShdw sx="100000" sy="100000" kx="0" ky="0" algn="bl" rotWithShape="0" blurRad="152400" dist="38100" dir="8100000">
+              <a:srgbClr val="000000">
+                <a:alpha val="22000"/>
+              </a:srgbClr>
+            </a:outerShdw>
+          </a:effectLst>
+        </p:spPr>
+      </p:sp>
       <p:pic>
         <p:nvPicPr>
-          <p:cNvPr id="4" name="Image 0" descr="C:\Users\Samy Chouaf\Desktop\smart-creator-design-system\assets\illustrations\notion-style\oc-on-the-laptop.svg">    </p:cNvPr>
+          <p:cNvPr id="7" name="Image 1" descr="C:\Users\Samy Chouaf\Desktop\smart-creator-design-system\assets\illustrations\notion-style\oc-thinking.svg">    </p:cNvPr>
           <p:cNvPicPr>
             <a:picLocks noChangeAspect="1"/>
           </p:cNvPicPr>
           <p:nvPr/>
         </p:nvPicPr>
         <p:blipFill>
-          <a:blip r:embed="rId1">
+          <a:blip r:embed="rId2">
             <a:extLst>
               <a:ext uri="{96DAC541-7B7A-43D3-8B79-37D633B846F1}">
-                <asvg:svgBlip xmlns:asvg="http://schemas.microsoft.com/office/drawing/2016/SVG/main" r:embed="rId2"/>
+                <asvg:svgBlip xmlns:asvg="http://schemas.microsoft.com/office/drawing/2016/SVG/main" r:embed="rId3"/>
               </a:ext>
             </a:extLst>
           </a:blip>
@@ -1315,28 +1407,87 @@
         </p:blipFill>
         <p:spPr>
           <a:xfrm>
-            <a:off x="457200" y="548640"/>
-            <a:ext cx="3474720" cy="3474720"/>
+            <a:off x="640080" y="960120"/>
+            <a:ext cx="2286000" cy="2697480"/>
           </a:xfrm>
           <a:prstGeom prst="rect">
             <a:avLst/>
           </a:prstGeom>
         </p:spPr>
       </p:pic>
-      <p:sp>
-        <p:nvSpPr>
-          <p:cNvPr id="5" name="Shape 2"/>
-          <p:cNvSpPr/>
-          <p:nvPr/>
-        </p:nvSpPr>
-        <p:spPr>
-          <a:xfrm>
-            <a:off x="3977640" y="1965960"/>
-            <a:ext cx="1188720" cy="594360"/>
+      <p:pic>
+        <p:nvPicPr>
+          <p:cNvPr id="8" name="Image 2" descr="C:\Users\Samy Chouaf\Desktop\smart-creator-design-system\assets\illustrations\notion-style\notion-ai-agent.svg">    </p:cNvPr>
+          <p:cNvPicPr>
+            <a:picLocks noChangeAspect="1"/>
+          </p:cNvPicPr>
+          <p:nvPr/>
+        </p:nvPicPr>
+        <p:blipFill>
+          <a:blip r:embed="rId4">
+            <a:extLst>
+              <a:ext uri="{96DAC541-7B7A-43D3-8B79-37D633B846F1}">
+                <asvg:svgBlip xmlns:asvg="http://schemas.microsoft.com/office/drawing/2016/SVG/main" r:embed="rId5"/>
+              </a:ext>
+            </a:extLst>
+          </a:blip>
+          <a:stretch>
+            <a:fillRect/>
+          </a:stretch>
+        </p:blipFill>
+        <p:spPr>
+          <a:xfrm>
+            <a:off x="6199632" y="914400"/>
+            <a:ext cx="2331720" cy="2788920"/>
+          </a:xfrm>
+          <a:prstGeom prst="rect">
+            <a:avLst/>
+          </a:prstGeom>
+        </p:spPr>
+      </p:pic>
+      <p:sp>
+        <p:nvSpPr>
+          <p:cNvPr id="9" name="Shape 4"/>
+          <p:cNvSpPr/>
+          <p:nvPr/>
+        </p:nvSpPr>
+        <p:spPr>
+          <a:xfrm>
+            <a:off x="3419856" y="2121408"/>
+            <a:ext cx="2304288" cy="457200"/>
           </a:xfrm>
           <a:prstGeom prst="roundRect">
             <a:avLst>
-              <a:gd name="adj" fmla="val 15385"/>
+              <a:gd name="adj" fmla="val 40000"/>
+            </a:avLst>
+          </a:prstGeom>
+          <a:solidFill>
+            <a:srgbClr val="FFE6F3"/>
+          </a:solidFill>
+          <a:ln w="12700">
+            <a:solidFill>
+              <a:srgbClr val="FFFFFF">
+                <a:alpha val="0"/>
+              </a:srgbClr>
+            </a:solidFill>
+            <a:prstDash val="solid"/>
+          </a:ln>
+        </p:spPr>
+      </p:sp>
+      <p:sp>
+        <p:nvSpPr>
+          <p:cNvPr id="10" name="Shape 5"/>
+          <p:cNvSpPr/>
+          <p:nvPr/>
+        </p:nvSpPr>
+        <p:spPr>
+          <a:xfrm>
+            <a:off x="3675888" y="2221992"/>
+            <a:ext cx="1444752" cy="256032"/>
+          </a:xfrm>
+          <a:prstGeom prst="roundRect">
+            <a:avLst>
+              <a:gd name="adj" fmla="val 42857"/>
             </a:avLst>
           </a:prstGeom>
           <a:solidFill>
@@ -1361,14 +1512,14 @@
       </p:sp>
       <p:sp>
         <p:nvSpPr>
-          <p:cNvPr id="6" name="Text 3"/>
-          <p:cNvSpPr/>
-          <p:nvPr/>
-        </p:nvSpPr>
-        <p:spPr>
-          <a:xfrm>
-            <a:off x="3977640" y="1965960"/>
-            <a:ext cx="1188720" cy="594360"/>
+          <p:cNvPr id="11" name="Text 6"/>
+          <p:cNvSpPr/>
+          <p:nvPr/>
+        </p:nvSpPr>
+        <p:spPr>
+          <a:xfrm>
+            <a:off x="4919472" y="2011680"/>
+            <a:ext cx="804672" cy="658368"/>
           </a:xfrm>
           <a:prstGeom prst="rect">
             <a:avLst/>
@@ -1384,9 +1535,9 @@
               <a:buNone/>
             </a:pPr>
             <a:r>
-              <a:rPr lang="en-US" sz="2800" dirty="0">
+              <a:rPr lang="en-US" sz="3300" b="1" dirty="0">
                 <a:solidFill>
-                  <a:srgbClr val="FFFFFF"/>
+                  <a:srgbClr val="092C69"/>
                 </a:solidFill>
                 <a:latin typeface="Montserrat" pitchFamily="34" charset="0"/>
                 <a:ea typeface="Montserrat" pitchFamily="34" charset="-122"/>
@@ -1394,50 +1545,78 @@
               </a:rPr>
               <a:t>→</a:t>
             </a:r>
-            <a:endParaRPr lang="en-US" sz="2800" dirty="0"/>
+            <a:endParaRPr lang="en-US" sz="3300" dirty="0"/>
           </a:p>
         </p:txBody>
       </p:sp>
-      <p:pic>
-        <p:nvPicPr>
-          <p:cNvPr id="7" name="Image 1" descr="C:\Users\Samy Chouaf\Desktop\smart-creator-design-system\assets\illustrations\notion-style\notion-ai-agent.svg">    </p:cNvPr>
-          <p:cNvPicPr>
-            <a:picLocks noChangeAspect="1"/>
-          </p:cNvPicPr>
-          <p:nvPr/>
-        </p:nvPicPr>
-        <p:blipFill>
-          <a:blip r:embed="rId3">
-            <a:extLst>
-              <a:ext uri="{96DAC541-7B7A-43D3-8B79-37D633B846F1}">
-                <asvg:svgBlip xmlns:asvg="http://schemas.microsoft.com/office/drawing/2016/SVG/main" r:embed="rId4"/>
-              </a:ext>
-            </a:extLst>
-          </a:blip>
-          <a:stretch>
-            <a:fillRect/>
-          </a:stretch>
-        </p:blipFill>
-        <p:spPr>
-          <a:xfrm>
-            <a:off x="5212080" y="548640"/>
-            <a:ext cx="3474720" cy="3474720"/>
-          </a:xfrm>
-          <a:prstGeom prst="rect">
-            <a:avLst/>
-          </a:prstGeom>
-        </p:spPr>
-      </p:pic>
-      <p:sp>
-        <p:nvSpPr>
-          <p:cNvPr id="8" name="Text 4"/>
-          <p:cNvSpPr/>
-          <p:nvPr/>
-        </p:nvSpPr>
-        <p:spPr>
-          <a:xfrm>
-            <a:off x="1097280" y="4160520"/>
-            <a:ext cx="6949440" cy="594360"/>
+      <p:sp>
+        <p:nvSpPr>
+          <p:cNvPr id="12" name="Shape 7"/>
+          <p:cNvSpPr/>
+          <p:nvPr/>
+        </p:nvSpPr>
+        <p:spPr>
+          <a:xfrm>
+            <a:off x="3246120" y="1938528"/>
+            <a:ext cx="237744" cy="237744"/>
+          </a:xfrm>
+          <a:prstGeom prst="ellipse">
+            <a:avLst/>
+          </a:prstGeom>
+          <a:solidFill>
+            <a:srgbClr val="B4EAFF">
+              <a:alpha val="90000"/>
+            </a:srgbClr>
+          </a:solidFill>
+          <a:ln w="12700">
+            <a:solidFill>
+              <a:srgbClr val="FFFFFF">
+                <a:alpha val="0"/>
+              </a:srgbClr>
+            </a:solidFill>
+            <a:prstDash val="solid"/>
+          </a:ln>
+        </p:spPr>
+      </p:sp>
+      <p:sp>
+        <p:nvSpPr>
+          <p:cNvPr id="13" name="Shape 8"/>
+          <p:cNvSpPr/>
+          <p:nvPr/>
+        </p:nvSpPr>
+        <p:spPr>
+          <a:xfrm>
+            <a:off x="5650992" y="2651760"/>
+            <a:ext cx="164592" cy="164592"/>
+          </a:xfrm>
+          <a:prstGeom prst="ellipse">
+            <a:avLst/>
+          </a:prstGeom>
+          <a:solidFill>
+            <a:srgbClr val="FDE68A">
+              <a:alpha val="95000"/>
+            </a:srgbClr>
+          </a:solidFill>
+          <a:ln w="12700">
+            <a:solidFill>
+              <a:srgbClr val="FFFFFF">
+                <a:alpha val="0"/>
+              </a:srgbClr>
+            </a:solidFill>
+            <a:prstDash val="solid"/>
+          </a:ln>
+        </p:spPr>
+      </p:sp>
+      <p:sp>
+        <p:nvSpPr>
+          <p:cNvPr id="14" name="Text 9"/>
+          <p:cNvSpPr/>
+          <p:nvPr/>
+        </p:nvSpPr>
+        <p:spPr>
+          <a:xfrm>
+            <a:off x="502920" y="4160520"/>
+            <a:ext cx="2743200" cy="402336"/>
           </a:xfrm>
           <a:prstGeom prst="rect">
             <a:avLst/>
@@ -1453,7 +1632,7 @@
               <a:buNone/>
             </a:pPr>
             <a:r>
-              <a:rPr lang="en-US" sz="4200" b="1" dirty="0">
+              <a:rPr lang="en-US" sz="1600" b="1" dirty="0">
                 <a:solidFill>
                   <a:srgbClr val="092C69"/>
                 </a:solidFill>
@@ -1461,22 +1640,22 @@
                 <a:ea typeface="Montserrat" pitchFamily="34" charset="-122"/>
                 <a:cs typeface="Montserrat" pitchFamily="34" charset="-120"/>
               </a:rPr>
-              <a:t>Your AI Design System</a:t>
+              <a:t>Human creator</a:t>
             </a:r>
-            <a:endParaRPr lang="en-US" sz="4200" dirty="0"/>
+            <a:endParaRPr lang="en-US" sz="1600" dirty="0"/>
           </a:p>
         </p:txBody>
       </p:sp>
       <p:sp>
         <p:nvSpPr>
-          <p:cNvPr id="9" name="Text 5"/>
-          <p:cNvSpPr/>
-          <p:nvPr/>
-        </p:nvSpPr>
-        <p:spPr>
-          <a:xfrm>
-            <a:off x="1097280" y="4663440"/>
-            <a:ext cx="6949440" cy="274320"/>
+          <p:cNvPr id="15" name="Text 10"/>
+          <p:cNvSpPr/>
+          <p:nvPr/>
+        </p:nvSpPr>
+        <p:spPr>
+          <a:xfrm>
+            <a:off x="5989320" y="4160520"/>
+            <a:ext cx="2743200" cy="402336"/>
           </a:xfrm>
           <a:prstGeom prst="rect">
             <a:avLst/>
@@ -1492,73 +1671,7 @@
               <a:buNone/>
             </a:pPr>
             <a:r>
-              <a:rPr lang="en-US" sz="1800" i="1" dirty="0">
-                <a:solidFill>
-                  <a:srgbClr val="323241"/>
-                </a:solidFill>
-                <a:latin typeface="Montserrat" pitchFamily="34" charset="0"/>
-                <a:ea typeface="Montserrat" pitchFamily="34" charset="-122"/>
-                <a:cs typeface="Montserrat" pitchFamily="34" charset="-120"/>
-              </a:rPr>
-              <a:t>Build once. Generate forever.</a:t>
-            </a:r>
-            <a:endParaRPr lang="en-US" sz="1800" dirty="0"/>
-          </a:p>
-        </p:txBody>
-      </p:sp>
-      <p:sp>
-        <p:nvSpPr>
-          <p:cNvPr id="10" name="Shape 6"/>
-          <p:cNvSpPr/>
-          <p:nvPr/>
-        </p:nvSpPr>
-        <p:spPr>
-          <a:xfrm>
-            <a:off x="0" y="4937760"/>
-            <a:ext cx="9144000" cy="205740"/>
-          </a:xfrm>
-          <a:prstGeom prst="rect">
-            <a:avLst/>
-          </a:prstGeom>
-          <a:solidFill>
-            <a:srgbClr val="B4EAFF"/>
-          </a:solidFill>
-          <a:ln w="12700">
-            <a:solidFill>
-              <a:srgbClr val="FFFFFF">
-                <a:alpha val="0"/>
-              </a:srgbClr>
-            </a:solidFill>
-            <a:prstDash val="solid"/>
-          </a:ln>
-        </p:spPr>
-      </p:sp>
-      <p:sp>
-        <p:nvSpPr>
-          <p:cNvPr id="11" name="Text 7"/>
-          <p:cNvSpPr/>
-          <p:nvPr/>
-        </p:nvSpPr>
-        <p:spPr>
-          <a:xfrm>
-            <a:off x="274320" y="4937760"/>
-            <a:ext cx="8595360" cy="205740"/>
-          </a:xfrm>
-          <a:prstGeom prst="rect">
-            <a:avLst/>
-          </a:prstGeom>
-          <a:noFill/>
-          <a:ln/>
-        </p:spPr>
-        <p:txBody>
-          <a:bodyPr wrap="square" lIns="0" tIns="0" rIns="0" bIns="0" rtlCol="0" anchor="ctr"/>
-          <a:lstStyle/>
-          <a:p>
-            <a:pPr algn="l" indent="0" marL="0">
-              <a:buNone/>
-            </a:pPr>
-            <a:r>
-              <a:rPr lang="en-US" sz="1000" b="1" dirty="0">
+              <a:rPr lang="en-US" sz="1600" b="1" dirty="0">
                 <a:solidFill>
                   <a:srgbClr val="092C69"/>
                 </a:solidFill>
@@ -1566,9 +1679,9 @@
                 <a:ea typeface="Montserrat" pitchFamily="34" charset="-122"/>
                 <a:cs typeface="Montserrat" pitchFamily="34" charset="-120"/>
               </a:rPr>
-              <a:t>Samy Chouaf</a:t>
+              <a:t>AI design agent</a:t>
             </a:r>
-            <a:endParaRPr lang="en-US" sz="1000" dirty="0"/>
+            <a:endParaRPr lang="en-US" sz="1600" dirty="0"/>
           </a:p>
         </p:txBody>
       </p:sp>
@@ -1707,7 +1820,7 @@
       </p:sp>
       <p:pic>
         <p:nvPicPr>
-          <p:cNvPr id="5" name="Image 0" descr="C:\Users\Samy Chouaf\Desktop\smart-creator-design-system\assets\icons\design\layers-stacked-1--Streamline-Freehand.svg">    </p:cNvPr>
+          <p:cNvPr id="5" name="Image 0" descr="C:\Users\Samy Chouaf\Desktop\smart-creator-design-system\assets\icons\design\design-tool-brush-ruler--Streamline-Freehand.svg">    </p:cNvPr>
           <p:cNvPicPr>
             <a:picLocks noChangeAspect="1"/>
           </p:cNvPicPr>
@@ -1836,7 +1949,7 @@
                 <a:ea typeface="Montserrat" pitchFamily="34" charset="-122"/>
                 <a:cs typeface="Montserrat" pitchFamily="34" charset="-120"/>
               </a:rPr>
-              <a:t>How to Build Your Design System</a:t>
+              <a:t>How to build your design system</a:t>
             </a:r>
             <a:endParaRPr lang="en-US" sz="2600" dirty="0"/>
           </a:p>
@@ -2006,7 +2119,7 @@
       </p:sp>
       <p:pic>
         <p:nvPicPr>
-          <p:cNvPr id="6" name="Image 1" descr="C:\Users\Samy Chouaf\Desktop\smart-creator-design-system\public\screenshots\powerpoint\YT - AI Design system\slide-02-01.png">    </p:cNvPr>
+          <p:cNvPr id="6" name="Image 1" descr="C:\Users\Samy Chouaf\Desktop\smart-creator-design-system\public\screenshots\powerpoint\YT - AI Design system\slide 02 - 1.png">    </p:cNvPr>
           <p:cNvPicPr>
             <a:picLocks noChangeAspect="1"/>
           </p:cNvPicPr>
@@ -2100,7 +2213,7 @@
       </p:sp>
       <p:pic>
         <p:nvPicPr>
-          <p:cNvPr id="9" name="Image 2" descr="C:\Users\Samy Chouaf\Desktop\smart-creator-design-system\public\screenshots\powerpoint\YT - AI Design system\slide-02-02.png">    </p:cNvPr>
+          <p:cNvPr id="9" name="Image 2" descr="C:\Users\Samy Chouaf\Desktop\smart-creator-design-system\public\screenshots\powerpoint\YT - AI Design system\slide 02 - 2.png">    </p:cNvPr>
           <p:cNvPicPr>
             <a:picLocks noChangeAspect="1"/>
           </p:cNvPicPr>
@@ -2191,7 +2304,7 @@
                 <a:ea typeface="Montserrat" pitchFamily="34" charset="-122"/>
                 <a:cs typeface="Montserrat" pitchFamily="34" charset="-120"/>
               </a:rPr>
-              <a:t>Generic AI output</a:t>
+              <a:t>AI slop: inconsistent, generic, off-brand</a:t>
             </a:r>
             <a:endParaRPr lang="en-US" sz="1000" dirty="0"/>
           </a:p>
@@ -2230,7 +2343,7 @@
                 <a:ea typeface="Montserrat" pitchFamily="34" charset="-122"/>
                 <a:cs typeface="Montserrat" pitchFamily="34" charset="-120"/>
               </a:rPr>
-              <a:t>Generic AI output</a:t>
+              <a:t>AI slop: inconsistent, generic, off-brand</a:t>
             </a:r>
             <a:endParaRPr lang="en-US" sz="1000" dirty="0"/>
           </a:p>
@@ -2283,7 +2396,7 @@
             <a:avLst/>
           </a:prstGeom>
           <a:solidFill>
-            <a:srgbClr val="D2FF9A">
+            <a:srgbClr val="FFA066">
               <a:alpha val="10000"/>
             </a:srgbClr>
           </a:solidFill>
@@ -2350,7 +2463,7 @@
             </a:avLst>
           </a:prstGeom>
           <a:solidFill>
-            <a:srgbClr val="D2FF9A"/>
+            <a:srgbClr val="FFA066"/>
           </a:solidFill>
           <a:ln w="12700">
             <a:solidFill>
@@ -2371,7 +2484,7 @@
       </p:sp>
       <p:pic>
         <p:nvPicPr>
-          <p:cNvPr id="5" name="Image 0" descr="C:\Users\Samy Chouaf\Desktop\smart-creator-design-system\assets\icons\design\design-tool-magic-wand--Streamline-Freehand.svg">    </p:cNvPr>
+          <p:cNvPr id="5" name="Image 0" descr="C:\Users\Samy Chouaf\Desktop\smart-creator-design-system\assets\icons\design\layers-stacked-1--Streamline-Freehand.svg">    </p:cNvPr>
           <p:cNvPicPr>
             <a:picLocks noChangeAspect="1"/>
           </p:cNvPicPr>
@@ -2416,7 +2529,7 @@
             </a:avLst>
           </a:prstGeom>
           <a:solidFill>
-            <a:srgbClr val="D2FF9A"/>
+            <a:srgbClr val="B4EAFF"/>
           </a:solidFill>
           <a:ln w="12700">
             <a:solidFill>
@@ -2500,7 +2613,7 @@
                 <a:ea typeface="Montserrat" pitchFamily="34" charset="-122"/>
                 <a:cs typeface="Montserrat" pitchFamily="34" charset="-120"/>
               </a:rPr>
-              <a:t>Design Your First Templates</a:t>
+              <a:t>Design your first templates</a:t>
             </a:r>
             <a:endParaRPr lang="en-US" sz="2600" dirty="0"/>
           </a:p>
@@ -3110,7 +3223,7 @@
                 <a:ea typeface="Montserrat" pitchFamily="34" charset="-122"/>
                 <a:cs typeface="Montserrat" pitchFamily="34" charset="-120"/>
               </a:rPr>
-              <a:t>1080 × 1080 px</a:t>
+              <a:t>1080 × 1350</a:t>
             </a:r>
             <a:endParaRPr lang="en-US" sz="1300" dirty="0"/>
           </a:p>
@@ -3149,7 +3262,7 @@
                 <a:ea typeface="Montserrat" pitchFamily="34" charset="-122"/>
                 <a:cs typeface="Montserrat" pitchFamily="34" charset="-120"/>
               </a:rPr>
-              <a:t>Square carousel</a:t>
+              <a:t>PDF carousel pages</a:t>
             </a:r>
             <a:endParaRPr lang="en-US" sz="1000" dirty="0"/>
           </a:p>
@@ -3279,7 +3392,7 @@
                 <a:ea typeface="Montserrat" pitchFamily="34" charset="-122"/>
                 <a:cs typeface="Montserrat" pitchFamily="34" charset="-120"/>
               </a:rPr>
-              <a:t>1080 × 1350 px</a:t>
+              <a:t>1080 × 1350</a:t>
             </a:r>
             <a:endParaRPr lang="en-US" sz="1300" dirty="0"/>
           </a:p>
@@ -3318,7 +3431,7 @@
                 <a:ea typeface="Montserrat" pitchFamily="34" charset="-122"/>
                 <a:cs typeface="Montserrat" pitchFamily="34" charset="-120"/>
               </a:rPr>
-              <a:t>Portrait format</a:t>
+              <a:t>Tall feed infographic</a:t>
             </a:r>
             <a:endParaRPr lang="en-US" sz="1000" dirty="0"/>
           </a:p>
@@ -3448,7 +3561,7 @@
                 <a:ea typeface="Montserrat" pitchFamily="34" charset="-122"/>
                 <a:cs typeface="Montserrat" pitchFamily="34" charset="-120"/>
               </a:rPr>
-              <a:t>1280 × 720 px</a:t>
+              <a:t>1920 × 1080</a:t>
             </a:r>
             <a:endParaRPr lang="en-US" sz="1300" dirty="0"/>
           </a:p>
@@ -3487,7 +3600,7 @@
                 <a:ea typeface="Montserrat" pitchFamily="34" charset="-122"/>
                 <a:cs typeface="Montserrat" pitchFamily="34" charset="-120"/>
               </a:rPr>
-              <a:t>16:9 presentation</a:t>
+              <a:t>16:9 video / webinar</a:t>
             </a:r>
             <a:endParaRPr lang="en-US" sz="1000" dirty="0"/>
           </a:p>
@@ -3735,7 +3848,7 @@
                 <a:ea typeface="Montserrat" pitchFamily="34" charset="-122"/>
                 <a:cs typeface="Montserrat" pitchFamily="34" charset="-120"/>
               </a:rPr>
-              <a:t>1080 × 1080 px</a:t>
+              <a:t>1080 × 1350</a:t>
             </a:r>
             <a:endParaRPr lang="en-US" sz="1300" dirty="0"/>
           </a:p>
@@ -3774,7 +3887,7 @@
                 <a:ea typeface="Montserrat" pitchFamily="34" charset="-122"/>
                 <a:cs typeface="Montserrat" pitchFamily="34" charset="-120"/>
               </a:rPr>
-              <a:t>Square carousel</a:t>
+              <a:t>Portrait carousel</a:t>
             </a:r>
             <a:endParaRPr lang="en-US" sz="1000" dirty="0"/>
           </a:p>
@@ -3898,7 +4011,7 @@
                 <a:ea typeface="Montserrat" pitchFamily="34" charset="-122"/>
                 <a:cs typeface="Montserrat" pitchFamily="34" charset="-120"/>
               </a:rPr>
-              <a:t>1080 × 1350 px</a:t>
+              <a:t>1080 × 1350</a:t>
             </a:r>
             <a:endParaRPr lang="en-US" sz="1300" dirty="0"/>
           </a:p>
@@ -3937,7 +4050,7 @@
                 <a:ea typeface="Montserrat" pitchFamily="34" charset="-122"/>
                 <a:cs typeface="Montserrat" pitchFamily="34" charset="-120"/>
               </a:rPr>
-              <a:t>Portrait format</a:t>
+              <a:t>Feed infographic</a:t>
             </a:r>
             <a:endParaRPr lang="en-US" sz="1000" dirty="0"/>
           </a:p>
@@ -4061,7 +4174,7 @@
                 <a:ea typeface="Montserrat" pitchFamily="34" charset="-122"/>
                 <a:cs typeface="Montserrat" pitchFamily="34" charset="-120"/>
               </a:rPr>
-              <a:t>1080 × 1080 px</a:t>
+              <a:t>1920 × 1080</a:t>
             </a:r>
             <a:endParaRPr lang="en-US" sz="1300" dirty="0"/>
           </a:p>
@@ -4100,7 +4213,7 @@
                 <a:ea typeface="Montserrat" pitchFamily="34" charset="-122"/>
                 <a:cs typeface="Montserrat" pitchFamily="34" charset="-120"/>
               </a:rPr>
-              <a:t>Square for Stories</a:t>
+              <a:t>Reel cover / story frame</a:t>
             </a:r>
             <a:endParaRPr lang="en-US" sz="1000" dirty="0"/>
           </a:p>
@@ -4348,7 +4461,7 @@
                 <a:ea typeface="Montserrat" pitchFamily="34" charset="-122"/>
                 <a:cs typeface="Montserrat" pitchFamily="34" charset="-120"/>
               </a:rPr>
-              <a:t>N/A</a:t>
+              <a:t>1280 × 720</a:t>
             </a:r>
             <a:endParaRPr lang="en-US" sz="1300" dirty="0"/>
           </a:p>
@@ -4387,7 +4500,7 @@
                 <a:ea typeface="Montserrat" pitchFamily="34" charset="-122"/>
                 <a:cs typeface="Montserrat" pitchFamily="34" charset="-120"/>
               </a:rPr>
-              <a:t>Not a native format</a:t>
+              <a:t>Thumbnail sequence</a:t>
             </a:r>
             <a:endParaRPr lang="en-US" sz="1000" dirty="0"/>
           </a:p>
@@ -4511,7 +4624,7 @@
                 <a:ea typeface="Montserrat" pitchFamily="34" charset="-122"/>
                 <a:cs typeface="Montserrat" pitchFamily="34" charset="-120"/>
               </a:rPr>
-              <a:t>1280 × 720 px</a:t>
+              <a:t>1080 × 1080</a:t>
             </a:r>
             <a:endParaRPr lang="en-US" sz="1300" dirty="0"/>
           </a:p>
@@ -4550,7 +4663,7 @@
                 <a:ea typeface="Montserrat" pitchFamily="34" charset="-122"/>
                 <a:cs typeface="Montserrat" pitchFamily="34" charset="-120"/>
               </a:rPr>
-              <a:t>Thumbnail size</a:t>
+              <a:t>Community visual</a:t>
             </a:r>
             <a:endParaRPr lang="en-US" sz="1000" dirty="0"/>
           </a:p>
@@ -4674,7 +4787,7 @@
                 <a:ea typeface="Montserrat" pitchFamily="34" charset="-122"/>
                 <a:cs typeface="Montserrat" pitchFamily="34" charset="-120"/>
               </a:rPr>
-              <a:t>1280 × 720 px</a:t>
+              <a:t>1920 × 1080</a:t>
             </a:r>
             <a:endParaRPr lang="en-US" sz="1300" dirty="0"/>
           </a:p>
@@ -4713,7 +4826,7 @@
                 <a:ea typeface="Montserrat" pitchFamily="34" charset="-122"/>
                 <a:cs typeface="Montserrat" pitchFamily="34" charset="-120"/>
               </a:rPr>
-              <a:t>16:9 presentation</a:t>
+              <a:t>Presentation / video</a:t>
             </a:r>
             <a:endParaRPr lang="en-US" sz="1000" dirty="0"/>
           </a:p>

--- a/design/pptx-slides/output/YtAiDesignSystemSlides.pptx
+++ b/design/pptx-slides/output/YtAiDesignSystemSlides.pptx
@@ -1387,20 +1387,14 @@
       </p:sp>
       <p:pic>
         <p:nvPicPr>
-          <p:cNvPr id="7" name="Image 1" descr="C:\Users\Samy Chouaf\Desktop\smart-creator-design-system\assets\illustrations\notion-style\oc-thinking.svg">    </p:cNvPr>
+          <p:cNvPr id="7" name="Image 1" descr="preencoded.png">    </p:cNvPr>
           <p:cNvPicPr>
             <a:picLocks noChangeAspect="1"/>
           </p:cNvPicPr>
           <p:nvPr/>
         </p:nvPicPr>
         <p:blipFill>
-          <a:blip r:embed="rId2">
-            <a:extLst>
-              <a:ext uri="{96DAC541-7B7A-43D3-8B79-37D633B846F1}">
-                <asvg:svgBlip xmlns:asvg="http://schemas.microsoft.com/office/drawing/2016/SVG/main" r:embed="rId3"/>
-              </a:ext>
-            </a:extLst>
-          </a:blip>
+          <a:blip r:embed="rId2"/>
           <a:stretch>
             <a:fillRect/>
           </a:stretch>
@@ -1417,20 +1411,14 @@
       </p:pic>
       <p:pic>
         <p:nvPicPr>
-          <p:cNvPr id="8" name="Image 2" descr="C:\Users\Samy Chouaf\Desktop\smart-creator-design-system\assets\illustrations\notion-style\notion-ai-agent.svg">    </p:cNvPr>
+          <p:cNvPr id="8" name="Image 2" descr="preencoded.png">    </p:cNvPr>
           <p:cNvPicPr>
             <a:picLocks noChangeAspect="1"/>
           </p:cNvPicPr>
           <p:nvPr/>
         </p:nvPicPr>
         <p:blipFill>
-          <a:blip r:embed="rId4">
-            <a:extLst>
-              <a:ext uri="{96DAC541-7B7A-43D3-8B79-37D633B846F1}">
-                <asvg:svgBlip xmlns:asvg="http://schemas.microsoft.com/office/drawing/2016/SVG/main" r:embed="rId5"/>
-              </a:ext>
-            </a:extLst>
-          </a:blip>
+          <a:blip r:embed="rId3"/>
           <a:stretch>
             <a:fillRect/>
           </a:stretch>
@@ -1820,20 +1808,14 @@
       </p:sp>
       <p:pic>
         <p:nvPicPr>
-          <p:cNvPr id="5" name="Image 0" descr="C:\Users\Samy Chouaf\Desktop\smart-creator-design-system\assets\icons\design\design-tool-brush-ruler--Streamline-Freehand.svg">    </p:cNvPr>
+          <p:cNvPr id="5" name="Image 0" descr="preencoded.png">    </p:cNvPr>
           <p:cNvPicPr>
             <a:picLocks noChangeAspect="1"/>
           </p:cNvPicPr>
           <p:nvPr/>
         </p:nvPicPr>
         <p:blipFill>
-          <a:blip r:embed="rId1">
-            <a:extLst>
-              <a:ext uri="{96DAC541-7B7A-43D3-8B79-37D633B846F1}">
-                <asvg:svgBlip xmlns:asvg="http://schemas.microsoft.com/office/drawing/2016/SVG/main" r:embed="rId2"/>
-              </a:ext>
-            </a:extLst>
-          </a:blip>
+          <a:blip r:embed="rId1"/>
           <a:stretch>
             <a:fillRect/>
           </a:stretch>
@@ -2016,20 +1998,14 @@
       </p:sp>
       <p:pic>
         <p:nvPicPr>
-          <p:cNvPr id="3" name="Image 0" descr="C:\Users\Samy Chouaf\Desktop\smart-creator-design-system\assets\icons\business\alerts-warning-triangle--Streamline-Freehand.svg">    </p:cNvPr>
+          <p:cNvPr id="3" name="Image 0" descr="preencoded.png">    </p:cNvPr>
           <p:cNvPicPr>
             <a:picLocks noChangeAspect="1"/>
           </p:cNvPicPr>
           <p:nvPr/>
         </p:nvPicPr>
         <p:blipFill>
-          <a:blip r:embed="rId1">
-            <a:extLst>
-              <a:ext uri="{96DAC541-7B7A-43D3-8B79-37D633B846F1}">
-                <asvg:svgBlip xmlns:asvg="http://schemas.microsoft.com/office/drawing/2016/SVG/main" r:embed="rId2"/>
-              </a:ext>
-            </a:extLst>
-          </a:blip>
+          <a:blip r:embed="rId1"/>
           <a:stretch>
             <a:fillRect/>
           </a:stretch>
@@ -2126,7 +2102,7 @@
           <p:nvPr/>
         </p:nvPicPr>
         <p:blipFill>
-          <a:blip r:embed="rId3"/>
+          <a:blip r:embed="rId2"/>
           <a:stretch>
             <a:fillRect/>
           </a:stretch>
@@ -2220,7 +2196,7 @@
           <p:nvPr/>
         </p:nvPicPr>
         <p:blipFill>
-          <a:blip r:embed="rId4"/>
+          <a:blip r:embed="rId3"/>
           <a:stretch>
             <a:fillRect/>
           </a:stretch>
@@ -2484,20 +2460,14 @@
       </p:sp>
       <p:pic>
         <p:nvPicPr>
-          <p:cNvPr id="5" name="Image 0" descr="C:\Users\Samy Chouaf\Desktop\smart-creator-design-system\assets\icons\design\layers-stacked-1--Streamline-Freehand.svg">    </p:cNvPr>
+          <p:cNvPr id="5" name="Image 0" descr="preencoded.png">    </p:cNvPr>
           <p:cNvPicPr>
             <a:picLocks noChangeAspect="1"/>
           </p:cNvPicPr>
           <p:nvPr/>
         </p:nvPicPr>
         <p:blipFill>
-          <a:blip r:embed="rId1">
-            <a:extLst>
-              <a:ext uri="{96DAC541-7B7A-43D3-8B79-37D633B846F1}">
-                <asvg:svgBlip xmlns:asvg="http://schemas.microsoft.com/office/drawing/2016/SVG/main" r:embed="rId2"/>
-              </a:ext>
-            </a:extLst>
-          </a:blip>
+          <a:blip r:embed="rId1"/>
           <a:stretch>
             <a:fillRect/>
           </a:stretch>
@@ -3032,20 +3002,14 @@
       </p:sp>
       <p:pic>
         <p:nvPicPr>
-          <p:cNvPr id="14" name="Image 2" descr="C:\Users\Samy Chouaf\Desktop\smart-creator-design-system\assets\logos\app\linkedin.svg">    </p:cNvPr>
+          <p:cNvPr id="14" name="Image 2" descr="preencoded.png">    </p:cNvPr>
           <p:cNvPicPr>
             <a:picLocks noChangeAspect="1"/>
           </p:cNvPicPr>
           <p:nvPr/>
         </p:nvPicPr>
         <p:blipFill>
-          <a:blip r:embed="rId3">
-            <a:extLst>
-              <a:ext uri="{96DAC541-7B7A-43D3-8B79-37D633B846F1}">
-                <asvg:svgBlip xmlns:asvg="http://schemas.microsoft.com/office/drawing/2016/SVG/main" r:embed="rId4"/>
-              </a:ext>
-            </a:extLst>
-          </a:blip>
+          <a:blip r:embed="rId3"/>
           <a:stretch>
             <a:fillRect/>
           </a:stretch>
@@ -3162,20 +3126,14 @@
       </p:sp>
       <p:pic>
         <p:nvPicPr>
-          <p:cNvPr id="18" name="Image 3" descr="C:\Users\Samy Chouaf\Desktop\smart-creator-design-system\assets\logos\app\linkedin.svg">    </p:cNvPr>
+          <p:cNvPr id="18" name="Image 3" descr="preencoded.png">    </p:cNvPr>
           <p:cNvPicPr>
             <a:picLocks noChangeAspect="1"/>
           </p:cNvPicPr>
           <p:nvPr/>
         </p:nvPicPr>
         <p:blipFill>
-          <a:blip r:embed="rId5">
-            <a:extLst>
-              <a:ext uri="{96DAC541-7B7A-43D3-8B79-37D633B846F1}">
-                <asvg:svgBlip xmlns:asvg="http://schemas.microsoft.com/office/drawing/2016/SVG/main" r:embed="rId6"/>
-              </a:ext>
-            </a:extLst>
-          </a:blip>
+          <a:blip r:embed="rId4"/>
           <a:stretch>
             <a:fillRect/>
           </a:stretch>
@@ -3331,20 +3289,14 @@
       </p:sp>
       <p:pic>
         <p:nvPicPr>
-          <p:cNvPr id="23" name="Image 4" descr="C:\Users\Samy Chouaf\Desktop\smart-creator-design-system\assets\logos\app\linkedin.svg">    </p:cNvPr>
+          <p:cNvPr id="23" name="Image 4" descr="preencoded.png">    </p:cNvPr>
           <p:cNvPicPr>
             <a:picLocks noChangeAspect="1"/>
           </p:cNvPicPr>
           <p:nvPr/>
         </p:nvPicPr>
         <p:blipFill>
-          <a:blip r:embed="rId7">
-            <a:extLst>
-              <a:ext uri="{96DAC541-7B7A-43D3-8B79-37D633B846F1}">
-                <asvg:svgBlip xmlns:asvg="http://schemas.microsoft.com/office/drawing/2016/SVG/main" r:embed="rId8"/>
-              </a:ext>
-            </a:extLst>
-          </a:blip>
+          <a:blip r:embed="rId5"/>
           <a:stretch>
             <a:fillRect/>
           </a:stretch>
@@ -3500,20 +3452,14 @@
       </p:sp>
       <p:pic>
         <p:nvPicPr>
-          <p:cNvPr id="28" name="Image 5" descr="C:\Users\Samy Chouaf\Desktop\smart-creator-design-system\assets\logos\app\linkedin.svg">    </p:cNvPr>
+          <p:cNvPr id="28" name="Image 5" descr="preencoded.png">    </p:cNvPr>
           <p:cNvPicPr>
             <a:picLocks noChangeAspect="1"/>
           </p:cNvPicPr>
           <p:nvPr/>
         </p:nvPicPr>
         <p:blipFill>
-          <a:blip r:embed="rId9">
-            <a:extLst>
-              <a:ext uri="{96DAC541-7B7A-43D3-8B79-37D633B846F1}">
-                <asvg:svgBlip xmlns:asvg="http://schemas.microsoft.com/office/drawing/2016/SVG/main" r:embed="rId10"/>
-              </a:ext>
-            </a:extLst>
-          </a:blip>
+          <a:blip r:embed="rId6"/>
           <a:stretch>
             <a:fillRect/>
           </a:stretch>
@@ -3676,7 +3622,7 @@
           <p:nvPr/>
         </p:nvPicPr>
         <p:blipFill>
-          <a:blip r:embed="rId11"/>
+          <a:blip r:embed="rId7"/>
           <a:stretch>
             <a:fillRect/>
           </a:stretch>
@@ -3800,7 +3746,7 @@
           <p:nvPr/>
         </p:nvPicPr>
         <p:blipFill>
-          <a:blip r:embed="rId12"/>
+          <a:blip r:embed="rId8"/>
           <a:stretch>
             <a:fillRect/>
           </a:stretch>
@@ -3963,7 +3909,7 @@
           <p:nvPr/>
         </p:nvPicPr>
         <p:blipFill>
-          <a:blip r:embed="rId13"/>
+          <a:blip r:embed="rId9"/>
           <a:stretch>
             <a:fillRect/>
           </a:stretch>
@@ -4126,7 +4072,7 @@
           <p:nvPr/>
         </p:nvPicPr>
         <p:blipFill>
-          <a:blip r:embed="rId14"/>
+          <a:blip r:embed="rId10"/>
           <a:stretch>
             <a:fillRect/>
           </a:stretch>
@@ -4289,7 +4235,7 @@
           <p:nvPr/>
         </p:nvPicPr>
         <p:blipFill>
-          <a:blip r:embed="rId15"/>
+          <a:blip r:embed="rId11"/>
           <a:stretch>
             <a:fillRect/>
           </a:stretch>
@@ -4413,7 +4359,7 @@
           <p:nvPr/>
         </p:nvPicPr>
         <p:blipFill>
-          <a:blip r:embed="rId16"/>
+          <a:blip r:embed="rId12"/>
           <a:stretch>
             <a:fillRect/>
           </a:stretch>
@@ -4576,7 +4522,7 @@
           <p:nvPr/>
         </p:nvPicPr>
         <p:blipFill>
-          <a:blip r:embed="rId17"/>
+          <a:blip r:embed="rId13"/>
           <a:stretch>
             <a:fillRect/>
           </a:stretch>
@@ -4739,7 +4685,7 @@
           <p:nvPr/>
         </p:nvPicPr>
         <p:blipFill>
-          <a:blip r:embed="rId18"/>
+          <a:blip r:embed="rId14"/>
           <a:stretch>
             <a:fillRect/>
           </a:stretch>
